--- a/public/fun/pack/pptx/birthdaypro/돌잔치프리미엄_34_감사인사중심_포레스트골드.pptx
+++ b/public/fun/pack/pptx/birthdaypro/돌잔치프리미엄_34_감사인사중심_포레스트골드.pptx
@@ -112,12 +112,12 @@
   <p:extLst>
     <p:ext uri="{521415D9-36F7-43E2-AB2F-B90AF26B5E84}">
       <p14:sectionLst xmlns:p14="http://schemas.microsoft.com/office/powerpoint/2010/main">
-        <p14:section name="시작" id="{AB1FAF4A-B02E-4A32-A3A9-94E14D07536A}">
+        <p14:section name="시작" id="{1A56C29A-C704-4CFD-A059-5DCA992B5C18}">
           <p14:sldIdLst>
             <p14:sldId id="256"/>
           </p14:sldIdLst>
         </p14:section>
-        <p14:section name="본문" id="{38EE691A-946D-41A1-A4DF-F378105D38A0}">
+        <p14:section name="본문" id="{DE9A1132-1197-4DF1-B700-76E5469C0CF8}">
           <p14:sldIdLst>
             <p14:sldId id="257"/>
             <p14:sldId id="258"/>
@@ -125,7 +125,7 @@
             <p14:sldId id="260"/>
           </p14:sldIdLst>
         </p14:section>
-        <p14:section name="마무리" id="{A23ACE3C-2646-4CF2-9F16-FF1139E11EDE}">
+        <p14:section name="마무리" id="{8FBC3CCB-E4AB-4A34-9DC0-4C56C185E339}">
           <p14:sldIdLst>
             <p14:sldId id="261"/>
           </p14:sldIdLst>
@@ -1435,7 +1435,7 @@
             </a:lvl1pPr>
           </a:lstStyle>
           <a:p>
-            <a:fld id="{7771BF58-3495-49D5-8666-13D37FACFBB8}" type="slidenum">
+            <a:fld id="{3D40FE8E-CA8C-4109-A33B-8027DD0D2A21}" type="slidenum">
               <a:rPr lang="en-US"/>
               <a:t>‹#›</a:t>
             </a:fld>
@@ -2410,7 +2410,7 @@
             </a:lvl1pPr>
           </a:lstStyle>
           <a:p>
-            <a:fld id="{35504CFE-A56A-47B6-AD90-D0A8E11326B6}" type="slidenum">
+            <a:fld id="{1F68F36B-B622-4D5B-96CC-CE849F6E5803}" type="slidenum">
               <a:rPr lang="en-US"/>
               <a:t>‹#›</a:t>
             </a:fld>
@@ -3417,7 +3417,7 @@
             </a:lvl1pPr>
           </a:lstStyle>
           <a:p>
-            <a:fld id="{257B6F87-CE08-4E06-916F-379D0B24AE07}" type="slidenum">
+            <a:fld id="{7296E86E-230C-489A-8D5E-119EC532DAE2}" type="slidenum">
               <a:rPr lang="en-US"/>
               <a:t>‹#›</a:t>
             </a:fld>
@@ -4580,7 +4580,7 @@
           <a:p>
             <a:r>
               <a:rPr lang="ko-KR"/>
-              <a:t>아기 이름 · 0000. 00. 00</a:t>
+              <a:t>아기 이름 · 날짜 입력</a:t>
             </a:r>
           </a:p>
           <a:p>
@@ -4740,7 +4740,7 @@
           <a:bodyPr/>
           <a:lstStyle/>
           <a:p>
-            <a:fld id="{F47E19F1-6E61-42D2-B667-FC69BAF259DE}" type="slidenum">
+            <a:fld id="{52DD3A45-761E-4AE8-9C63-5A5419186CE6}" type="slidenum">
               <a:rPr lang="en-US"/>
               <a:t>‹#›</a:t>
             </a:fld>
@@ -5340,7 +5340,7 @@
           <a:bodyPr/>
           <a:lstStyle/>
           <a:p>
-            <a:fld id="{14E858D9-E1F1-4CE8-A80C-B9B29E02DBFE}" type="slidenum">
+            <a:fld id="{BADC6CF2-DB4F-4A8D-A5EF-E37DE6526949}" type="slidenum">
               <a:rPr lang="en-US"/>
               <a:t>‹#›</a:t>
             </a:fld>
@@ -5694,7 +5694,7 @@
           <a:bodyPr/>
           <a:lstStyle/>
           <a:p>
-            <a:fld id="{E6AFAB67-747E-4E63-9E3E-349549893C4B}" type="slidenum">
+            <a:fld id="{15AA1F67-C636-47A2-BC35-E870BDC07A12}" type="slidenum">
               <a:rPr lang="en-US"/>
               <a:t>‹#›</a:t>
             </a:fld>
@@ -6568,7 +6568,7 @@
           <a:bodyPr/>
           <a:lstStyle/>
           <a:p>
-            <a:fld id="{9A7B9D82-032F-45FF-9EDF-0C95AA67C8B9}" type="slidenum">
+            <a:fld id="{F23EE241-00C3-4982-8937-06277CDA232C}" type="slidenum">
               <a:rPr lang="en-US"/>
               <a:t>‹#›</a:t>
             </a:fld>
